--- a/docs/明鉴_方案.pptx
+++ b/docs/明鉴_方案.pptx
@@ -1336,7 +1336,7 @@
                   <a:ea typeface="Microsoft YaHei"/>
                   <a:cs typeface="Microsoft YaHei"/>
                 </a:rPr>
-                <a:t>风险提示：报告标注「AI 辅助生成，不构成投资建议」</a:t>
+                <a:t>风险提示：报告标注「仅供研究参考，不构成投资建议」</a:t>
               </a:r>
             </a:p>
             <a:p>
@@ -1629,8 +1629,8 @@
           </p:nvSpPr>
           <p:spPr>
             <a:xfrm>
-              <a:off x="4142735" y="6050756"/>
-              <a:ext cx="3906530" cy="220028"/>
+              <a:off x="4808703" y="6050756"/>
+              <a:ext cx="2574595" cy="220028"/>
             </a:xfrm>
             <a:prstGeom prst="rect">
               <a:avLst/>
@@ -1656,7 +1656,7 @@
                   <a:ea typeface="Microsoft YaHei"/>
                   <a:cs typeface="Microsoft YaHei"/>
                 </a:rPr>
-                <a:t>本工具由 AI 辅助生成，仅供研究参考，不构成投资建议</a:t>
+                <a:t>本工具仅供研究参考，不构成投资建议</a:t>
               </a:r>
             </a:p>
           </p:txBody>
